--- a/deck.pptx
+++ b/deck.pptx
@@ -3266,8 +3266,8 @@
         </p:nvSpPr>
         <p:spPr>
           <a:xfrm>
-            <a:off x="857228" y="1699128"/>
-            <a:ext cx="3238418" cy="4000399"/>
+            <a:off x="258529" y="1526483"/>
+            <a:ext cx="3608524" cy="4457589"/>
           </a:xfrm>
           <a:prstGeom prst="rect">
             <a:avLst/>
@@ -3314,8 +3314,8 @@
         </p:nvSpPr>
         <p:spPr>
           <a:xfrm>
-            <a:off x="4476638" y="1699128"/>
-            <a:ext cx="3238418" cy="4000399"/>
+            <a:off x="4291585" y="1526483"/>
+            <a:ext cx="3608524" cy="4457589"/>
           </a:xfrm>
           <a:prstGeom prst="rect">
             <a:avLst/>
@@ -3362,8 +3362,8 @@
         </p:nvSpPr>
         <p:spPr>
           <a:xfrm>
-            <a:off x="8096047" y="1699128"/>
-            <a:ext cx="3238418" cy="4000399"/>
+            <a:off x="8324641" y="1526483"/>
+            <a:ext cx="3608524" cy="4457589"/>
           </a:xfrm>
           <a:prstGeom prst="rect">
             <a:avLst/>
